--- a/slides/4-7_cardiac_risk_assessment/4-7_cardiac_risk_assessment.pptx
+++ b/slides/4-7_cardiac_risk_assessment/4-7_cardiac_risk_assessment.pptx
@@ -4258,12 +4258,12 @@
         </p:nvSpPr>
         <p:spPr>
           <a:xfrm>
-            <a:off x="502920" y="4919472"/>
-            <a:ext cx="11183112" cy="932688"/>
+            <a:off x="502920" y="4864608"/>
+            <a:ext cx="11183112" cy="1024128"/>
           </a:xfrm>
           <a:prstGeom prst="roundRect">
             <a:avLst>
-              <a:gd name="adj" fmla="val 7843"/>
+              <a:gd name="adj" fmla="val 7143"/>
             </a:avLst>
           </a:prstGeom>
           <a:solidFill>
@@ -4285,8 +4285,8 @@
         </p:nvSpPr>
         <p:spPr>
           <a:xfrm>
-            <a:off x="576072" y="4992624"/>
-            <a:ext cx="11036808" cy="786384"/>
+            <a:off x="576072" y="4937760"/>
+            <a:ext cx="11036808" cy="877824"/>
           </a:xfrm>
           <a:prstGeom prst="rect">
             <a:avLst/>
@@ -4300,7 +4300,7 @@
           <a:p>
             <a:pPr algn="ctr" indent="0" marL="0">
               <a:lnSpc>
-                <a:spcPct val="80000"/>
+                <a:spcPct val="90000"/>
               </a:lnSpc>
               <a:buNone/>
             </a:pPr>
@@ -4320,7 +4320,7 @@
           <a:p>
             <a:pPr algn="ctr" indent="0" marL="0">
               <a:lnSpc>
-                <a:spcPct val="80000"/>
+                <a:spcPct val="90000"/>
               </a:lnSpc>
               <a:buNone/>
             </a:pPr>
@@ -7311,8 +7311,8 @@
             <a:tbl>
               <a:tblPr/>
               <a:tblGrid>
-                <a:gridCol w="2057400"/>
-                <a:gridCol w="5010912"/>
+                <a:gridCol w="1828800"/>
+                <a:gridCol w="5239512"/>
                 <a:gridCol w="4087368"/>
               </a:tblGrid>
               <a:tr h="365760">
@@ -9803,7 +9803,7 @@
                 <a:ea typeface="メイリオ" pitchFamily="34" charset="-122"/>
                 <a:cs typeface="メイリオ" pitchFamily="34" charset="-120"/>
               </a:rPr>
-              <a:t>Devereaux PJ, et al. JAMA 2017;317:1642-1651/Halvorsen S, et al. Eur Heart J</a:t>
+              <a:t>Devereaux PJ, et al. JAMA 2017;317:1642-1651（VISION）/Halvorsen S, et al. Eur Heart J</a:t>
             </a:r>
             <a:endParaRPr lang="ja-JP" sz="1600" dirty="0"/>
           </a:p>
@@ -10038,12 +10038,12 @@
         </p:nvSpPr>
         <p:spPr>
           <a:xfrm>
-            <a:off x="502920" y="4809744"/>
-            <a:ext cx="11183112" cy="932688"/>
+            <a:off x="502920" y="4754880"/>
+            <a:ext cx="11183112" cy="1115568"/>
           </a:xfrm>
           <a:prstGeom prst="roundRect">
             <a:avLst>
-              <a:gd name="adj" fmla="val 7843"/>
+              <a:gd name="adj" fmla="val 6557"/>
             </a:avLst>
           </a:prstGeom>
           <a:solidFill>
@@ -10065,8 +10065,8 @@
         </p:nvSpPr>
         <p:spPr>
           <a:xfrm>
-            <a:off x="576072" y="4882896"/>
-            <a:ext cx="11036808" cy="786384"/>
+            <a:off x="576072" y="4828032"/>
+            <a:ext cx="11036808" cy="969264"/>
           </a:xfrm>
           <a:prstGeom prst="rect">
             <a:avLst/>
@@ -10079,9 +10079,6 @@
           <a:lstStyle/>
           <a:p>
             <a:pPr algn="ctr" indent="0" marL="0">
-              <a:lnSpc>
-                <a:spcPct val="80000"/>
-              </a:lnSpc>
               <a:buNone/>
             </a:pPr>
             <a:r>
@@ -10099,9 +10096,6 @@
           </a:p>
           <a:p>
             <a:pPr algn="ctr" indent="0" marL="0">
-              <a:lnSpc>
-                <a:spcPct val="80000"/>
-              </a:lnSpc>
               <a:buNone/>
             </a:pPr>
             <a:r>

--- a/slides/4-7_cardiac_risk_assessment/4-7_cardiac_risk_assessment.pptx
+++ b/slides/4-7_cardiac_risk_assessment/4-7_cardiac_risk_assessment.pptx
@@ -3895,11 +3895,14 @@
           <a:p>
             <a:pPr algn="l" marL="254000" indent="-254000">
               <a:lnSpc>
-                <a:spcPct val="80000"/>
+                <a:spcPct val="85000"/>
               </a:lnSpc>
               <a:spcAft>
-                <a:spcPts val="810"/>
+                <a:spcPts val="350"/>
               </a:spcAft>
+              <a:buClr>
+                <a:srgbClr val="262626"/>
+              </a:buClr>
               <a:buSzPct val="100000"/>
               <a:buChar char="•"/>
             </a:pPr>
@@ -3919,8 +3922,11 @@
           <a:p>
             <a:pPr algn="l" marL="254000" indent="-254000">
               <a:lnSpc>
-                <a:spcPct val="80000"/>
+                <a:spcPct val="85000"/>
               </a:lnSpc>
+              <a:buClr>
+                <a:srgbClr val="262626"/>
+              </a:buClr>
               <a:buSzPct val="100000"/>
               <a:buChar char="•"/>
             </a:pPr>
@@ -3940,11 +3946,14 @@
           <a:p>
             <a:pPr algn="l" marL="254000" indent="-254000">
               <a:lnSpc>
-                <a:spcPct val="80000"/>
+                <a:spcPct val="85000"/>
               </a:lnSpc>
               <a:spcAft>
-                <a:spcPts val="810"/>
+                <a:spcPts val="350"/>
               </a:spcAft>
+              <a:buClr>
+                <a:srgbClr val="262626"/>
+              </a:buClr>
               <a:buSzPct val="100000"/>
               <a:buChar char="　"/>
             </a:pPr>
@@ -3964,8 +3973,11 @@
           <a:p>
             <a:pPr algn="l" marL="254000" indent="-254000">
               <a:lnSpc>
-                <a:spcPct val="80000"/>
+                <a:spcPct val="85000"/>
               </a:lnSpc>
+              <a:buClr>
+                <a:srgbClr val="262626"/>
+              </a:buClr>
               <a:buSzPct val="100000"/>
               <a:buChar char="•"/>
             </a:pPr>
@@ -3985,11 +3997,14 @@
           <a:p>
             <a:pPr algn="l" marL="254000" indent="-254000">
               <a:lnSpc>
-                <a:spcPct val="80000"/>
+                <a:spcPct val="85000"/>
               </a:lnSpc>
               <a:spcAft>
-                <a:spcPts val="810"/>
+                <a:spcPts val="350"/>
               </a:spcAft>
+              <a:buClr>
+                <a:srgbClr val="262626"/>
+              </a:buClr>
               <a:buSzPct val="100000"/>
               <a:buChar char="　"/>
             </a:pPr>
@@ -4009,8 +4024,11 @@
           <a:p>
             <a:pPr algn="l" marL="254000" indent="-254000">
               <a:lnSpc>
-                <a:spcPct val="80000"/>
+                <a:spcPct val="85000"/>
               </a:lnSpc>
+              <a:buClr>
+                <a:srgbClr val="262626"/>
+              </a:buClr>
               <a:buSzPct val="100000"/>
               <a:buChar char="•"/>
             </a:pPr>
@@ -4113,8 +4131,11 @@
           <a:p>
             <a:pPr algn="l" marL="254000" indent="-254000">
               <a:lnSpc>
-                <a:spcPct val="80000"/>
+                <a:spcPct val="85000"/>
               </a:lnSpc>
+              <a:buClr>
+                <a:srgbClr val="262626"/>
+              </a:buClr>
               <a:buSzPct val="100000"/>
               <a:buChar char="•"/>
             </a:pPr>
@@ -4134,11 +4155,14 @@
           <a:p>
             <a:pPr algn="l" marL="254000" indent="-254000">
               <a:lnSpc>
-                <a:spcPct val="80000"/>
+                <a:spcPct val="85000"/>
               </a:lnSpc>
               <a:spcAft>
-                <a:spcPts val="600"/>
+                <a:spcPts val="350"/>
               </a:spcAft>
+              <a:buClr>
+                <a:srgbClr val="262626"/>
+              </a:buClr>
               <a:buSzPct val="100000"/>
               <a:buChar char="　"/>
             </a:pPr>
@@ -4158,11 +4182,14 @@
           <a:p>
             <a:pPr algn="l" marL="254000" indent="-254000">
               <a:lnSpc>
-                <a:spcPct val="80000"/>
+                <a:spcPct val="85000"/>
               </a:lnSpc>
               <a:spcAft>
-                <a:spcPts val="600"/>
+                <a:spcPts val="350"/>
               </a:spcAft>
+              <a:buClr>
+                <a:srgbClr val="262626"/>
+              </a:buClr>
               <a:buSzPct val="100000"/>
               <a:buChar char="•"/>
             </a:pPr>
@@ -4182,11 +4209,14 @@
           <a:p>
             <a:pPr algn="l" marL="254000" indent="-254000">
               <a:lnSpc>
-                <a:spcPct val="80000"/>
+                <a:spcPct val="85000"/>
               </a:lnSpc>
               <a:spcAft>
-                <a:spcPts val="600"/>
+                <a:spcPts val="350"/>
               </a:spcAft>
+              <a:buClr>
+                <a:srgbClr val="262626"/>
+              </a:buClr>
               <a:buSzPct val="100000"/>
               <a:buChar char="•"/>
             </a:pPr>
@@ -4206,11 +4236,14 @@
           <a:p>
             <a:pPr algn="l" marL="254000" indent="-254000">
               <a:lnSpc>
-                <a:spcPct val="80000"/>
+                <a:spcPct val="85000"/>
               </a:lnSpc>
               <a:spcAft>
-                <a:spcPts val="600"/>
+                <a:spcPts val="350"/>
               </a:spcAft>
+              <a:buClr>
+                <a:srgbClr val="262626"/>
+              </a:buClr>
               <a:buSzPct val="100000"/>
               <a:buChar char="•"/>
             </a:pPr>
@@ -4230,8 +4263,11 @@
           <a:p>
             <a:pPr algn="l" marL="254000" indent="-254000">
               <a:lnSpc>
-                <a:spcPct val="80000"/>
+                <a:spcPct val="85000"/>
               </a:lnSpc>
+              <a:buClr>
+                <a:srgbClr val="262626"/>
+              </a:buClr>
               <a:buSzPct val="100000"/>
               <a:buChar char="•"/>
             </a:pPr>
@@ -4788,7 +4824,7 @@
           </p:nvPr>
         </p:nvGraphicFramePr>
         <p:xfrm>
-          <a:off x="502920" y="1691640"/>
+          <a:off x="502920" y="1664208"/>
           <a:ext cx="11155680" cy="914400"/>
         </p:xfrm>
         <a:graphic>
@@ -4799,7 +4835,7 @@
                 <a:gridCol w="4032504"/>
                 <a:gridCol w="7123176"/>
               </a:tblGrid>
-              <a:tr h="365760">
+              <a:tr h="373990">
                 <a:tc>
                   <a:txBody>
                     <a:bodyPr/>
@@ -4829,7 +4865,7 @@
                       </a:endParaRPr>
                     </a:p>
                   </a:txBody>
-                  <a:tcPr marL="76200" marR="76200" marT="12700" marB="12700" anchor="ctr">
+                  <a:tcPr marL="76200" marR="76200" marT="33020" marB="5080" anchor="ctr">
                     <a:lnL w="12700" cap="flat" cmpd="sng" algn="ctr">
                       <a:solidFill>
                         <a:srgbClr val="BFBFBF"/>
@@ -4900,7 +4936,7 @@
                       </a:endParaRPr>
                     </a:p>
                   </a:txBody>
-                  <a:tcPr marL="76200" marR="76200" marT="12700" marB="12700" anchor="ctr">
+                  <a:tcPr marL="76200" marR="76200" marT="33020" marB="5080" anchor="ctr">
                     <a:lnL w="12700" cap="flat" cmpd="sng" algn="ctr">
                       <a:solidFill>
                         <a:srgbClr val="BFBFBF"/>
@@ -4943,7 +4979,7 @@
                   </a:tcPr>
                 </a:tc>
               </a:tr>
-              <a:tr h="365760">
+              <a:tr h="373990">
                 <a:tc>
                   <a:txBody>
                     <a:bodyPr/>
@@ -4973,7 +5009,7 @@
                       </a:endParaRPr>
                     </a:p>
                   </a:txBody>
-                  <a:tcPr marL="76200" marR="76200" marT="12700" marB="12700" anchor="ctr">
+                  <a:tcPr marL="76200" marR="76200" marT="33020" marB="5080" anchor="ctr">
                     <a:lnL w="12700" cap="flat" cmpd="sng" algn="ctr">
                       <a:solidFill>
                         <a:srgbClr val="BFBFBF"/>
@@ -5041,7 +5077,7 @@
                       </a:endParaRPr>
                     </a:p>
                   </a:txBody>
-                  <a:tcPr marL="76200" marR="76200" marT="12700" marB="12700" anchor="ctr">
+                  <a:tcPr marL="76200" marR="76200" marT="33020" marB="5080" anchor="ctr">
                     <a:lnL w="12700" cap="flat" cmpd="sng" algn="ctr">
                       <a:solidFill>
                         <a:srgbClr val="BFBFBF"/>
@@ -5081,7 +5117,7 @@
                   </a:tcPr>
                 </a:tc>
               </a:tr>
-              <a:tr h="704088">
+              <a:tr h="708660">
                 <a:tc>
                   <a:txBody>
                     <a:bodyPr/>
@@ -5111,7 +5147,7 @@
                       </a:endParaRPr>
                     </a:p>
                   </a:txBody>
-                  <a:tcPr marL="76200" marR="76200" marT="12700" marB="12700" anchor="ctr">
+                  <a:tcPr marL="76200" marR="76200" marT="33020" marB="5080" anchor="ctr">
                     <a:lnL w="12700" cap="flat" cmpd="sng" algn="ctr">
                       <a:solidFill>
                         <a:srgbClr val="BFBFBF"/>
@@ -5203,7 +5239,7 @@
                       </a:endParaRPr>
                     </a:p>
                   </a:txBody>
-                  <a:tcPr marL="76200" marR="76200" marT="12700" marB="12700" anchor="ctr">
+                  <a:tcPr marL="76200" marR="76200" marT="33020" marB="5080" anchor="ctr">
                     <a:lnL w="12700" cap="flat" cmpd="sng" algn="ctr">
                       <a:solidFill>
                         <a:srgbClr val="BFBFBF"/>
@@ -5243,7 +5279,7 @@
                   </a:tcPr>
                 </a:tc>
               </a:tr>
-              <a:tr h="704088">
+              <a:tr h="708660">
                 <a:tc>
                   <a:txBody>
                     <a:bodyPr/>
@@ -5273,7 +5309,7 @@
                       </a:endParaRPr>
                     </a:p>
                   </a:txBody>
-                  <a:tcPr marL="76200" marR="76200" marT="12700" marB="12700" anchor="ctr">
+                  <a:tcPr marL="76200" marR="76200" marT="33020" marB="5080" anchor="ctr">
                     <a:lnL w="12700" cap="flat" cmpd="sng" algn="ctr">
                       <a:solidFill>
                         <a:srgbClr val="BFBFBF"/>
@@ -5365,7 +5401,7 @@
                       </a:endParaRPr>
                     </a:p>
                   </a:txBody>
-                  <a:tcPr marL="76200" marR="76200" marT="12700" marB="12700" anchor="ctr">
+                  <a:tcPr marL="76200" marR="76200" marT="33020" marB="5080" anchor="ctr">
                     <a:lnL w="12700" cap="flat" cmpd="sng" algn="ctr">
                       <a:solidFill>
                         <a:srgbClr val="BFBFBF"/>
@@ -5405,7 +5441,7 @@
                   </a:tcPr>
                 </a:tc>
               </a:tr>
-              <a:tr h="365760">
+              <a:tr h="373990">
                 <a:tc>
                   <a:txBody>
                     <a:bodyPr/>
@@ -5435,7 +5471,7 @@
                       </a:endParaRPr>
                     </a:p>
                   </a:txBody>
-                  <a:tcPr marL="76200" marR="76200" marT="12700" marB="12700" anchor="ctr">
+                  <a:tcPr marL="76200" marR="76200" marT="33020" marB="5080" anchor="ctr">
                     <a:lnL w="12700" cap="flat" cmpd="sng" algn="ctr">
                       <a:solidFill>
                         <a:srgbClr val="BFBFBF"/>
@@ -5503,7 +5539,7 @@
                       </a:endParaRPr>
                     </a:p>
                   </a:txBody>
-                  <a:tcPr marL="76200" marR="76200" marT="12700" marB="12700" anchor="ctr">
+                  <a:tcPr marL="76200" marR="76200" marT="33020" marB="5080" anchor="ctr">
                     <a:lnL w="12700" cap="flat" cmpd="sng" algn="ctr">
                       <a:solidFill>
                         <a:srgbClr val="BFBFBF"/>
@@ -5543,7 +5579,7 @@
                   </a:tcPr>
                 </a:tc>
               </a:tr>
-              <a:tr h="365760">
+              <a:tr h="373990">
                 <a:tc>
                   <a:txBody>
                     <a:bodyPr/>
@@ -5573,7 +5609,7 @@
                       </a:endParaRPr>
                     </a:p>
                   </a:txBody>
-                  <a:tcPr marL="76200" marR="76200" marT="12700" marB="12700" anchor="ctr">
+                  <a:tcPr marL="76200" marR="76200" marT="33020" marB="5080" anchor="ctr">
                     <a:lnL w="12700" cap="flat" cmpd="sng" algn="ctr">
                       <a:solidFill>
                         <a:srgbClr val="BFBFBF"/>
@@ -5641,7 +5677,7 @@
                       </a:endParaRPr>
                     </a:p>
                   </a:txBody>
-                  <a:tcPr marL="76200" marR="76200" marT="12700" marB="12700" anchor="ctr">
+                  <a:tcPr marL="76200" marR="76200" marT="33020" marB="5080" anchor="ctr">
                     <a:lnL w="12700" cap="flat" cmpd="sng" algn="ctr">
                       <a:solidFill>
                         <a:srgbClr val="BFBFBF"/>
@@ -5681,7 +5717,7 @@
                   </a:tcPr>
                 </a:tc>
               </a:tr>
-              <a:tr h="365760">
+              <a:tr h="373990">
                 <a:tc>
                   <a:txBody>
                     <a:bodyPr/>
@@ -5711,7 +5747,7 @@
                       </a:endParaRPr>
                     </a:p>
                   </a:txBody>
-                  <a:tcPr marL="76200" marR="76200" marT="12700" marB="12700" anchor="ctr">
+                  <a:tcPr marL="76200" marR="76200" marT="33020" marB="5080" anchor="ctr">
                     <a:lnL w="12700" cap="flat" cmpd="sng" algn="ctr">
                       <a:solidFill>
                         <a:srgbClr val="BFBFBF"/>
@@ -5779,7 +5815,7 @@
                       </a:endParaRPr>
                     </a:p>
                   </a:txBody>
-                  <a:tcPr marL="76200" marR="76200" marT="12700" marB="12700" anchor="ctr">
+                  <a:tcPr marL="76200" marR="76200" marT="33020" marB="5080" anchor="ctr">
                     <a:lnL w="12700" cap="flat" cmpd="sng" algn="ctr">
                       <a:solidFill>
                         <a:srgbClr val="BFBFBF"/>
@@ -5831,8 +5867,8 @@
         </p:nvSpPr>
         <p:spPr>
           <a:xfrm>
-            <a:off x="502920" y="5166360"/>
-            <a:ext cx="11183112" cy="740664"/>
+            <a:off x="502920" y="5170932"/>
+            <a:ext cx="11183112" cy="736092"/>
           </a:xfrm>
           <a:prstGeom prst="rect">
             <a:avLst/>
@@ -5848,10 +5884,13 @@
               <a:lnSpc>
                 <a:spcPct val="80000"/>
               </a:lnSpc>
-              <a:buNone/>
-            </a:pPr>
-            <a:r>
-              <a:rPr lang="ja-JP" altLang="en-US" sz="2400" dirty="0">
+              <a:spcAft>
+                <a:spcPts val="510"/>
+              </a:spcAft>
+              <a:buNone/>
+            </a:pPr>
+            <a:r>
+              <a:rPr lang="ja-JP" altLang="en-US" sz="2200" dirty="0">
                 <a:solidFill>
                   <a:srgbClr val="262626"/>
                 </a:solidFill>
@@ -5861,7 +5900,7 @@
               </a:rPr>
               <a:t>主要心合併症：0 点 0.4%、1 点 0.9%、2 点 7%、3 点以上 11%</a:t>
             </a:r>
-            <a:endParaRPr lang="ja-JP" sz="2400" dirty="0"/>
+            <a:endParaRPr lang="ja-JP" sz="2200" dirty="0"/>
           </a:p>
           <a:p>
             <a:pPr algn="l" indent="0" marL="0">
@@ -5871,7 +5910,7 @@
               <a:buNone/>
             </a:pPr>
             <a:r>
-              <a:rPr lang="ja-JP" altLang="en-US" sz="2400" dirty="0">
+              <a:rPr lang="ja-JP" altLang="en-US" sz="2200" dirty="0">
                 <a:solidFill>
                   <a:srgbClr val="262626"/>
                 </a:solidFill>
@@ -5882,7 +5921,7 @@
               <a:t>（Lee 1999 検証群）。</a:t>
             </a:r>
             <a:r>
-              <a:rPr lang="ja-JP" altLang="en-US" sz="2400" b="1" dirty="0">
+              <a:rPr lang="ja-JP" altLang="en-US" sz="2200" b="1" dirty="0">
                 <a:solidFill>
                   <a:srgbClr val="D55E00"/>
                 </a:solidFill>
@@ -5892,7 +5931,7 @@
               </a:rPr>
               <a:t>近年は 3.9〜15%</a:t>
             </a:r>
-            <a:endParaRPr lang="ja-JP" sz="2400" dirty="0"/>
+            <a:endParaRPr lang="ja-JP" sz="2200" dirty="0"/>
           </a:p>
         </p:txBody>
       </p:sp>
@@ -6296,7 +6335,7 @@
                 <a:ea typeface="メイリオ" pitchFamily="34" charset="-122"/>
                 <a:cs typeface="メイリオ" pitchFamily="34" charset="-120"/>
               </a:rPr>
-              <a:t>Wijeysundera DN, et al. Lancet 2018;391:2631-2640/Thompson A, et al. Circulation</a:t>
+              <a:t>Wijeysundera DN, et al. Lancet 2018;391:2631-2640 / Thompson A, et al. Circulation</a:t>
             </a:r>
             <a:endParaRPr lang="ja-JP" sz="1600" dirty="0"/>
           </a:p>
@@ -6313,7 +6352,7 @@
                 <a:ea typeface="メイリオ" pitchFamily="34" charset="-122"/>
                 <a:cs typeface="メイリオ" pitchFamily="34" charset="-120"/>
               </a:rPr>
-              <a:t>2024;150:e351-e442/日本循環器学会 2022 年改訂版 非心臓手術における合併心疾患ガイドライン</a:t>
+              <a:t>2024;150:e351-e442 / 日本循環器学会 2022 年改訂版 非心臓手術における合併心疾患ガイドライン</a:t>
             </a:r>
             <a:endParaRPr lang="ja-JP" sz="1600" dirty="0"/>
           </a:p>
@@ -6406,8 +6445,11 @@
                 <a:spcPct val="80000"/>
               </a:lnSpc>
               <a:spcAft>
-                <a:spcPts val="2580"/>
+                <a:spcPts val="800"/>
               </a:spcAft>
+              <a:buClr>
+                <a:srgbClr val="262626"/>
+              </a:buClr>
               <a:buSzPct val="100000"/>
               <a:buChar char="•"/>
             </a:pPr>
@@ -6430,8 +6472,11 @@
                 <a:spcPct val="80000"/>
               </a:lnSpc>
               <a:spcAft>
-                <a:spcPts val="2580"/>
+                <a:spcPts val="800"/>
               </a:spcAft>
+              <a:buClr>
+                <a:srgbClr val="262626"/>
+              </a:buClr>
               <a:buSzPct val="100000"/>
               <a:buChar char="•"/>
             </a:pPr>
@@ -6454,8 +6499,11 @@
                 <a:spcPct val="80000"/>
               </a:lnSpc>
               <a:spcAft>
-                <a:spcPts val="2580"/>
+                <a:spcPts val="800"/>
               </a:spcAft>
+              <a:buClr>
+                <a:srgbClr val="262626"/>
+              </a:buClr>
               <a:buSzPct val="100000"/>
               <a:buChar char="•"/>
             </a:pPr>
@@ -6477,6 +6525,9 @@
               <a:lnSpc>
                 <a:spcPct val="80000"/>
               </a:lnSpc>
+              <a:buClr>
+                <a:srgbClr val="262626"/>
+              </a:buClr>
               <a:buSzPct val="100000"/>
               <a:buChar char="•"/>
             </a:pPr>
@@ -6498,6 +6549,9 @@
               <a:lnSpc>
                 <a:spcPct val="80000"/>
               </a:lnSpc>
+              <a:buClr>
+                <a:srgbClr val="262626"/>
+              </a:buClr>
               <a:buSzPct val="100000"/>
               <a:buChar char="　"/>
             </a:pPr>
@@ -6602,6 +6656,9 @@
               <a:lnSpc>
                 <a:spcPct val="80000"/>
               </a:lnSpc>
+              <a:buClr>
+                <a:srgbClr val="262626"/>
+              </a:buClr>
               <a:buSzPct val="100000"/>
               <a:buChar char="•"/>
             </a:pPr>
@@ -6624,8 +6681,11 @@
                 <a:spcPct val="80000"/>
               </a:lnSpc>
               <a:spcAft>
-                <a:spcPts val="820"/>
+                <a:spcPts val="800"/>
               </a:spcAft>
+              <a:buClr>
+                <a:srgbClr val="262626"/>
+              </a:buClr>
               <a:buSzPct val="100000"/>
               <a:buChar char="　"/>
             </a:pPr>
@@ -6648,8 +6708,11 @@
                 <a:spcPct val="80000"/>
               </a:lnSpc>
               <a:spcAft>
-                <a:spcPts val="820"/>
+                <a:spcPts val="800"/>
               </a:spcAft>
+              <a:buClr>
+                <a:srgbClr val="262626"/>
+              </a:buClr>
               <a:buSzPct val="100000"/>
               <a:buChar char="•"/>
             </a:pPr>
@@ -6693,6 +6756,9 @@
               <a:lnSpc>
                 <a:spcPct val="80000"/>
               </a:lnSpc>
+              <a:buClr>
+                <a:srgbClr val="262626"/>
+              </a:buClr>
               <a:buSzPct val="100000"/>
               <a:buChar char="•"/>
             </a:pPr>
@@ -6715,8 +6781,11 @@
                 <a:spcPct val="80000"/>
               </a:lnSpc>
               <a:spcAft>
-                <a:spcPts val="820"/>
+                <a:spcPts val="800"/>
               </a:spcAft>
+              <a:buClr>
+                <a:srgbClr val="262626"/>
+              </a:buClr>
               <a:buSzPct val="100000"/>
               <a:buChar char="　"/>
             </a:pPr>
@@ -6738,6 +6807,9 @@
               <a:lnSpc>
                 <a:spcPct val="80000"/>
               </a:lnSpc>
+              <a:buClr>
+                <a:srgbClr val="262626"/>
+              </a:buClr>
               <a:buSzPct val="100000"/>
               <a:buChar char="•"/>
             </a:pPr>
@@ -6759,6 +6831,9 @@
               <a:lnSpc>
                 <a:spcPct val="80000"/>
               </a:lnSpc>
+              <a:buClr>
+                <a:srgbClr val="262626"/>
+              </a:buClr>
               <a:buSzPct val="100000"/>
               <a:buChar char="　"/>
             </a:pPr>
@@ -7303,7 +7378,7 @@
           </p:nvPr>
         </p:nvGraphicFramePr>
         <p:xfrm>
-          <a:off x="502920" y="1691640"/>
+          <a:off x="502920" y="1664208"/>
           <a:ext cx="11155680" cy="914400"/>
         </p:xfrm>
         <a:graphic>
@@ -7315,7 +7390,7 @@
                 <a:gridCol w="5239512"/>
                 <a:gridCol w="4087368"/>
               </a:tblGrid>
-              <a:tr h="365760">
+              <a:tr h="373990">
                 <a:tc>
                   <a:txBody>
                     <a:bodyPr/>
@@ -7345,7 +7420,7 @@
                       </a:endParaRPr>
                     </a:p>
                   </a:txBody>
-                  <a:tcPr marL="76200" marR="76200" marT="12700" marB="12700" anchor="ctr">
+                  <a:tcPr marL="76200" marR="76200" marT="33020" marB="5080" anchor="ctr">
                     <a:lnL w="12700" cap="flat" cmpd="sng" algn="ctr">
                       <a:solidFill>
                         <a:srgbClr val="BFBFBF"/>
@@ -7416,7 +7491,7 @@
                       </a:endParaRPr>
                     </a:p>
                   </a:txBody>
-                  <a:tcPr marL="76200" marR="76200" marT="12700" marB="12700" anchor="ctr">
+                  <a:tcPr marL="76200" marR="76200" marT="33020" marB="5080" anchor="ctr">
                     <a:lnL w="12700" cap="flat" cmpd="sng" algn="ctr">
                       <a:solidFill>
                         <a:srgbClr val="BFBFBF"/>
@@ -7487,7 +7562,7 @@
                       </a:endParaRPr>
                     </a:p>
                   </a:txBody>
-                  <a:tcPr marL="76200" marR="76200" marT="12700" marB="12700" anchor="ctr">
+                  <a:tcPr marL="76200" marR="76200" marT="33020" marB="5080" anchor="ctr">
                     <a:lnL w="12700" cap="flat" cmpd="sng" algn="ctr">
                       <a:solidFill>
                         <a:srgbClr val="BFBFBF"/>
@@ -7530,7 +7605,7 @@
                   </a:tcPr>
                 </a:tc>
               </a:tr>
-              <a:tr h="1033272">
+              <a:tr h="1044245">
                 <a:tc>
                   <a:txBody>
                     <a:bodyPr/>
@@ -7584,7 +7659,7 @@
                       </a:endParaRPr>
                     </a:p>
                   </a:txBody>
-                  <a:tcPr marL="76200" marR="76200" marT="12700" marB="12700" anchor="ctr">
+                  <a:tcPr marL="76200" marR="76200" marT="33020" marB="5080" anchor="ctr">
                     <a:lnL w="12700" cap="flat" cmpd="sng" algn="ctr">
                       <a:solidFill>
                         <a:srgbClr val="BFBFBF"/>
@@ -7700,7 +7775,7 @@
                       </a:endParaRPr>
                     </a:p>
                   </a:txBody>
-                  <a:tcPr marL="76200" marR="76200" marT="12700" marB="12700" anchor="ctr">
+                  <a:tcPr marL="76200" marR="76200" marT="33020" marB="5080" anchor="ctr">
                     <a:lnL w="12700" cap="flat" cmpd="sng" algn="ctr">
                       <a:solidFill>
                         <a:srgbClr val="BFBFBF"/>
@@ -7816,7 +7891,7 @@
                       </a:endParaRPr>
                     </a:p>
                   </a:txBody>
-                  <a:tcPr marL="76200" marR="76200" marT="12700" marB="12700" anchor="ctr">
+                  <a:tcPr marL="76200" marR="76200" marT="33020" marB="5080" anchor="ctr">
                     <a:lnL w="12700" cap="flat" cmpd="sng" algn="ctr">
                       <a:solidFill>
                         <a:srgbClr val="BFBFBF"/>
@@ -7856,7 +7931,7 @@
                   </a:tcPr>
                 </a:tc>
               </a:tr>
-              <a:tr h="1033272">
+              <a:tr h="1044245">
                 <a:tc>
                   <a:txBody>
                     <a:bodyPr/>
@@ -7910,7 +7985,7 @@
                       </a:endParaRPr>
                     </a:p>
                   </a:txBody>
-                  <a:tcPr marL="76200" marR="76200" marT="12700" marB="12700" anchor="ctr">
+                  <a:tcPr marL="76200" marR="76200" marT="33020" marB="5080" anchor="ctr">
                     <a:lnL w="12700" cap="flat" cmpd="sng" algn="ctr">
                       <a:solidFill>
                         <a:srgbClr val="BFBFBF"/>
@@ -8026,7 +8101,7 @@
                       </a:endParaRPr>
                     </a:p>
                   </a:txBody>
-                  <a:tcPr marL="76200" marR="76200" marT="12700" marB="12700" anchor="ctr">
+                  <a:tcPr marL="76200" marR="76200" marT="33020" marB="5080" anchor="ctr">
                     <a:lnL w="12700" cap="flat" cmpd="sng" algn="ctr">
                       <a:solidFill>
                         <a:srgbClr val="BFBFBF"/>
@@ -8142,7 +8217,7 @@
                       </a:endParaRPr>
                     </a:p>
                   </a:txBody>
-                  <a:tcPr marL="76200" marR="76200" marT="12700" marB="12700" anchor="ctr">
+                  <a:tcPr marL="76200" marR="76200" marT="33020" marB="5080" anchor="ctr">
                     <a:lnL w="12700" cap="flat" cmpd="sng" algn="ctr">
                       <a:solidFill>
                         <a:srgbClr val="BFBFBF"/>
@@ -8182,7 +8257,7 @@
                   </a:tcPr>
                 </a:tc>
               </a:tr>
-              <a:tr h="704088">
+              <a:tr h="708660">
                 <a:tc>
                   <a:txBody>
                     <a:bodyPr/>
@@ -8212,7 +8287,7 @@
                       </a:endParaRPr>
                     </a:p>
                   </a:txBody>
-                  <a:tcPr marL="76200" marR="76200" marT="12700" marB="12700" anchor="ctr">
+                  <a:tcPr marL="76200" marR="76200" marT="33020" marB="5080" anchor="ctr">
                     <a:lnL w="12700" cap="flat" cmpd="sng" algn="ctr">
                       <a:solidFill>
                         <a:srgbClr val="BFBFBF"/>
@@ -8304,7 +8379,7 @@
                       </a:endParaRPr>
                     </a:p>
                   </a:txBody>
-                  <a:tcPr marL="76200" marR="76200" marT="12700" marB="12700" anchor="ctr">
+                  <a:tcPr marL="76200" marR="76200" marT="33020" marB="5080" anchor="ctr">
                     <a:lnL w="12700" cap="flat" cmpd="sng" algn="ctr">
                       <a:solidFill>
                         <a:srgbClr val="BFBFBF"/>
@@ -8396,7 +8471,7 @@
                       </a:endParaRPr>
                     </a:p>
                   </a:txBody>
-                  <a:tcPr marL="76200" marR="76200" marT="12700" marB="12700" anchor="ctr">
+                  <a:tcPr marL="76200" marR="76200" marT="33020" marB="5080" anchor="ctr">
                     <a:lnL w="12700" cap="flat" cmpd="sng" algn="ctr">
                       <a:solidFill>
                         <a:srgbClr val="BFBFBF"/>
@@ -8436,7 +8511,7 @@
                   </a:tcPr>
                 </a:tc>
               </a:tr>
-              <a:tr h="1033272">
+              <a:tr h="1044245">
                 <a:tc>
                   <a:txBody>
                     <a:bodyPr/>
@@ -8466,7 +8541,7 @@
                       </a:endParaRPr>
                     </a:p>
                   </a:txBody>
-                  <a:tcPr marL="76200" marR="76200" marT="12700" marB="12700" anchor="ctr">
+                  <a:tcPr marL="76200" marR="76200" marT="33020" marB="5080" anchor="ctr">
                     <a:lnL w="12700" cap="flat" cmpd="sng" algn="ctr">
                       <a:solidFill>
                         <a:srgbClr val="BFBFBF"/>
@@ -8582,7 +8657,7 @@
                       </a:endParaRPr>
                     </a:p>
                   </a:txBody>
-                  <a:tcPr marL="76200" marR="76200" marT="12700" marB="12700" anchor="ctr">
+                  <a:tcPr marL="76200" marR="76200" marT="33020" marB="5080" anchor="ctr">
                     <a:lnL w="12700" cap="flat" cmpd="sng" algn="ctr">
                       <a:solidFill>
                         <a:srgbClr val="BFBFBF"/>
@@ -8698,7 +8773,7 @@
                       </a:endParaRPr>
                     </a:p>
                   </a:txBody>
-                  <a:tcPr marL="76200" marR="76200" marT="12700" marB="12700" anchor="ctr">
+                  <a:tcPr marL="76200" marR="76200" marT="33020" marB="5080" anchor="ctr">
                     <a:lnL w="12700" cap="flat" cmpd="sng" algn="ctr">
                       <a:solidFill>
                         <a:srgbClr val="BFBFBF"/>
@@ -9190,6 +9265,9 @@
               <a:spcAft>
                 <a:spcPts val="2200"/>
               </a:spcAft>
+              <a:buClr>
+                <a:srgbClr val="262626"/>
+              </a:buClr>
               <a:buSzPct val="100000"/>
               <a:buChar char="•"/>
             </a:pPr>
@@ -9222,6 +9300,9 @@
               <a:spcAft>
                 <a:spcPts val="2200"/>
               </a:spcAft>
+              <a:buClr>
+                <a:srgbClr val="262626"/>
+              </a:buClr>
               <a:buSzPct val="100000"/>
               <a:buChar char="•"/>
             </a:pPr>
@@ -9254,6 +9335,9 @@
               <a:spcAft>
                 <a:spcPts val="2200"/>
               </a:spcAft>
+              <a:buClr>
+                <a:srgbClr val="262626"/>
+              </a:buClr>
               <a:buSzPct val="100000"/>
               <a:buChar char="•"/>
             </a:pPr>
@@ -9297,6 +9381,9 @@
               <a:spcAft>
                 <a:spcPts val="2200"/>
               </a:spcAft>
+              <a:buClr>
+                <a:srgbClr val="262626"/>
+              </a:buClr>
               <a:buSzPct val="100000"/>
               <a:buChar char="•"/>
             </a:pPr>
@@ -9803,7 +9890,7 @@
                 <a:ea typeface="メイリオ" pitchFamily="34" charset="-122"/>
                 <a:cs typeface="メイリオ" pitchFamily="34" charset="-120"/>
               </a:rPr>
-              <a:t>Devereaux PJ, et al. JAMA 2017;317:1642-1651（VISION）/Halvorsen S, et al. Eur Heart J</a:t>
+              <a:t>Devereaux PJ, et al. JAMA 2017;317:1642-1651（VISION） / Halvorsen S, et al. Eur Heart J</a:t>
             </a:r>
             <a:endParaRPr lang="ja-JP" sz="1600" dirty="0"/>
           </a:p>
@@ -9820,7 +9907,7 @@
                 <a:ea typeface="メイリオ" pitchFamily="34" charset="-122"/>
                 <a:cs typeface="メイリオ" pitchFamily="34" charset="-120"/>
               </a:rPr>
-              <a:t>2022;43:3826-3924/日本循環器学会 2022 年改訂版 非心臓手術における合併心疾患ガイドライン</a:t>
+              <a:t>2022;43:3826-3924 / 日本循環器学会 2022 年改訂版 非心臓手術における合併心疾患ガイドライン</a:t>
             </a:r>
             <a:endParaRPr lang="ja-JP" sz="1600" dirty="0"/>
           </a:p>
@@ -9851,6 +9938,9 @@
               <a:spcAft>
                 <a:spcPts val="1000"/>
               </a:spcAft>
+              <a:buClr>
+                <a:srgbClr val="262626"/>
+              </a:buClr>
               <a:buSzPct val="100000"/>
               <a:buChar char="•"/>
             </a:pPr>
@@ -9883,6 +9973,9 @@
               <a:spcAft>
                 <a:spcPts val="1000"/>
               </a:spcAft>
+              <a:buClr>
+                <a:srgbClr val="262626"/>
+              </a:buClr>
               <a:buSzPct val="100000"/>
               <a:buChar char="•"/>
             </a:pPr>
@@ -9915,6 +10008,9 @@
               <a:spcAft>
                 <a:spcPts val="1000"/>
               </a:spcAft>
+              <a:buClr>
+                <a:srgbClr val="262626"/>
+              </a:buClr>
               <a:buSzPct val="100000"/>
               <a:buChar char="•"/>
             </a:pPr>
@@ -9936,6 +10032,9 @@
               <a:spcAft>
                 <a:spcPts val="1000"/>
               </a:spcAft>
+              <a:buClr>
+                <a:srgbClr val="262626"/>
+              </a:buClr>
               <a:buSzPct val="100000"/>
               <a:buChar char="•"/>
             </a:pPr>
@@ -9975,7 +10074,7 @@
             <a:r>
               <a:rPr lang="ja-JP" altLang="en-US" sz="2400" b="1" dirty="0">
                 <a:solidFill>
-                  <a:srgbClr val="D55E00"/>
+                  <a:srgbClr val="262626"/>
                 </a:solidFill>
                 <a:latin typeface="メイリオ" pitchFamily="34" charset="0"/>
                 <a:ea typeface="メイリオ" pitchFamily="34" charset="-122"/>
@@ -10012,6 +10111,9 @@
               <a:spcAft>
                 <a:spcPts val="1000"/>
               </a:spcAft>
+              <a:buClr>
+                <a:srgbClr val="262626"/>
+              </a:buClr>
               <a:buSzPct val="100000"/>
               <a:buChar char="•"/>
             </a:pPr>
@@ -10524,7 +10626,7 @@
                 <a:ea typeface="メイリオ" pitchFamily="34" charset="-122"/>
                 <a:cs typeface="メイリオ" pitchFamily="34" charset="-120"/>
               </a:rPr>
-              <a:t>日本循環器学会 2022 年改訂版 非心臓手術における合併心疾患ガイドライン/Thompson A, et al.</a:t>
+              <a:t>日本循環器学会 2022 年改訂版 非心臓手術における合併心疾患ガイドライン / Thompson A, et al.</a:t>
             </a:r>
             <a:endParaRPr lang="ja-JP" sz="1600" dirty="0"/>
           </a:p>
@@ -10541,7 +10643,7 @@
                 <a:ea typeface="メイリオ" pitchFamily="34" charset="-122"/>
                 <a:cs typeface="メイリオ" pitchFamily="34" charset="-120"/>
               </a:rPr>
-              <a:t>Circulation 2024;150:e351-e442/Halvorsen S, et al. Eur Heart J 2022;43:3826-3924</a:t>
+              <a:t>Circulation 2024;150:e351-e442 / Halvorsen S, et al. Eur Heart J 2022;43:3826-3924</a:t>
             </a:r>
             <a:endParaRPr lang="ja-JP" sz="1600" dirty="0"/>
           </a:p>
@@ -10572,6 +10674,9 @@
               <a:spcAft>
                 <a:spcPts val="2400"/>
               </a:spcAft>
+              <a:buClr>
+                <a:srgbClr val="262626"/>
+              </a:buClr>
               <a:buSzPct val="100000"/>
               <a:buChar char="•"/>
             </a:pPr>
@@ -10604,6 +10709,9 @@
               <a:spcAft>
                 <a:spcPts val="2400"/>
               </a:spcAft>
+              <a:buClr>
+                <a:srgbClr val="262626"/>
+              </a:buClr>
               <a:buSzPct val="100000"/>
               <a:buChar char="•"/>
             </a:pPr>
@@ -10636,6 +10744,9 @@
               <a:spcAft>
                 <a:spcPts val="2400"/>
               </a:spcAft>
+              <a:buClr>
+                <a:srgbClr val="262626"/>
+              </a:buClr>
               <a:buSzPct val="100000"/>
               <a:buChar char="•"/>
             </a:pPr>
@@ -10679,6 +10790,9 @@
               <a:spcAft>
                 <a:spcPts val="2400"/>
               </a:spcAft>
+              <a:buClr>
+                <a:srgbClr val="262626"/>
+              </a:buClr>
               <a:buSzPct val="100000"/>
               <a:buChar char="•"/>
             </a:pPr>
@@ -10711,6 +10825,9 @@
               <a:spcAft>
                 <a:spcPts val="2400"/>
               </a:spcAft>
+              <a:buClr>
+                <a:srgbClr val="262626"/>
+              </a:buClr>
               <a:buSzPct val="100000"/>
               <a:buChar char="•"/>
             </a:pPr>
